--- a/slides/00 Course Intro.pptx
+++ b/slides/00 Course Intro.pptx
@@ -1652,7 +1652,7 @@
           <a:lstStyle/>
           <a:p>
             <a:r>
-              <a:t>Point out the patterns: each session has one main topic, and most are a named pattern.</a:t>
+              <a:t>Point out the patterns: each session has one main topic, a problem every game runs into, and the patterns that solve it. The schedule lists both.</a:t>
             </a:r>
           </a:p>
           <a:p>

--- a/slides/00 Course Intro.pptx
+++ b/slides/00 Course Intro.pptx
@@ -1652,7 +1652,7 @@
           <a:lstStyle/>
           <a:p>
             <a:r>
-              <a:t>Point out the patterns: each session has one main topic, a problem every game runs into, and the patterns that solve it. The schedule lists both.</a:t>
+              <a:t>Each session has one main topic and a few patterns that go with it. The schedule lists both.</a:t>
             </a:r>
           </a:p>
           <a:p>

--- a/slides/00 Course Intro.pptx
+++ b/slides/00 Course Intro.pptx
@@ -1103,7 +1103,7 @@
           <a:lstStyle/>
           <a:p>
             <a:r>
-              <a:t>Open the site and show the schedule, the project page and the exam page. Then gar-games and the starter template.</a:t>
+              <a:t>Open the site and show the overview, the project page and the exam page. Then gar-games and the starter template.</a:t>
             </a:r>
           </a:p>
           <a:p>
@@ -1652,7 +1652,7 @@
           <a:lstStyle/>
           <a:p>
             <a:r>
-              <a:t>Each session has one main topic and a few patterns that go with it. The schedule lists both.</a:t>
+              <a:t>Each session has one main topic and a few patterns that go with it. The overview page lists both.</a:t>
             </a:r>
           </a:p>
           <a:p>
@@ -1751,7 +1751,7 @@
           </a:p>
           <a:p>
             <a:r>
-              <a:t>The schedule on the site lists each session’s topics.</a:t>
+              <a:t>The overview page on the site lists each session’s topics.</a:t>
             </a:r>
           </a:p>
         </p:txBody>
@@ -6372,7 +6372,7 @@
             </a:pPr>
             <a:r>
               <a:rPr lang="en"/>
-              <a:t>The course site: sessions, schedule, project and exam</a:t>
+              <a:t>The course site: sessions, overview, project and exam</a:t>
             </a:r>
             <a:endParaRPr/>
           </a:p>

--- a/slides/00 Course Intro.pptx
+++ b/slides/00 Course Intro.pptx
@@ -7303,7 +7303,7 @@
             </a:pPr>
             <a:r>
               <a:rPr lang="en"/>
-              <a:t>State, Observer, Command, Component, Singleton, Service Locator, Prototype, Object Pool, etc..</a:t>
+              <a:t>State, Observer, Command, Component, Singleton, Service Locator, Prototype, Object Pool, etc.</a:t>
             </a:r>
             <a:endParaRPr/>
           </a:p>

--- a/slides/00 Course Intro.pptx
+++ b/slides/00 Course Intro.pptx
@@ -6731,34 +6731,6 @@
           </a:p>
         </p:txBody>
       </p:sp>
-      <p:pic>
-        <p:nvPicPr>
-          <p:cNvPr id="54" name="Google Shape;54;p11"/>
-          <p:cNvPicPr preferRelativeResize="0"/>
-          <p:nvPr/>
-        </p:nvPicPr>
-        <p:blipFill>
-          <a:blip r:embed="rId3">
-            <a:alphaModFix/>
-          </a:blip>
-          <a:stretch>
-            <a:fillRect/>
-          </a:stretch>
-        </p:blipFill>
-        <p:spPr>
-          <a:xfrm>
-            <a:off x="2385650" y="1563194"/>
-            <a:ext cx="4372700" cy="2450901"/>
-          </a:xfrm>
-          <a:prstGeom prst="rect">
-            <a:avLst/>
-          </a:prstGeom>
-          <a:noFill/>
-          <a:ln>
-            <a:noFill/>
-          </a:ln>
-        </p:spPr>
-      </p:pic>
     </p:spTree>
   </p:cSld>
   <p:clrMapOvr>
@@ -7780,34 +7752,6 @@
           <a:chExt cx="0" cy="0"/>
         </a:xfrm>
       </p:grpSpPr>
-      <p:pic>
-        <p:nvPicPr>
-          <p:cNvPr id="88" name="Google Shape;88;p17"/>
-          <p:cNvPicPr preferRelativeResize="0"/>
-          <p:nvPr/>
-        </p:nvPicPr>
-        <p:blipFill>
-          <a:blip r:embed="rId3">
-            <a:alphaModFix/>
-          </a:blip>
-          <a:stretch>
-            <a:fillRect/>
-          </a:stretch>
-        </p:blipFill>
-        <p:spPr>
-          <a:xfrm>
-            <a:off x="3013825" y="533775"/>
-            <a:ext cx="3116351" cy="3842575"/>
-          </a:xfrm>
-          <a:prstGeom prst="rect">
-            <a:avLst/>
-          </a:prstGeom>
-          <a:noFill/>
-          <a:ln>
-            <a:noFill/>
-          </a:ln>
-        </p:spPr>
-      </p:pic>
       <p:sp>
         <p:nvSpPr>
           <p:cNvPr id="89" name="Google Shape;89;p17"/>
@@ -7864,6 +7808,74 @@
               <a:cs typeface="Roboto Light"/>
               <a:sym typeface="Roboto Light"/>
             </a:endParaRPr>
+          </a:p>
+        </p:txBody>
+      </p:sp>
+      <p:sp>
+        <p:nvSpPr>
+          <p:cNvPr id="90" name="TextBox 89"/>
+          <p:cNvSpPr txBox="1"/>
+          <p:nvPr/>
+        </p:nvSpPr>
+        <p:spPr>
+          <a:xfrm>
+            <a:off x="457200" y="1920240"/>
+            <a:ext cx="8229600" cy="457200"/>
+          </a:xfrm>
+          <a:prstGeom prst="rect">
+            <a:avLst/>
+          </a:prstGeom>
+          <a:noFill/>
+        </p:spPr>
+        <p:txBody>
+          <a:bodyPr wrap="square">
+            <a:spAutoFit/>
+          </a:bodyPr>
+          <a:lstStyle/>
+          <a:p>
+            <a:pPr algn="ctr"/>
+            <a:r>
+              <a:rPr sz="2200" b="0" i="0">
+                <a:solidFill>
+                  <a:srgbClr val="DEE2E6"/>
+                </a:solidFill>
+              </a:rPr>
+              <a:t>Game Programming Patterns</a:t>
+            </a:r>
+          </a:p>
+        </p:txBody>
+      </p:sp>
+      <p:sp>
+        <p:nvSpPr>
+          <p:cNvPr id="91" name="TextBox 90"/>
+          <p:cNvSpPr txBox="1"/>
+          <p:nvPr/>
+        </p:nvSpPr>
+        <p:spPr>
+          <a:xfrm>
+            <a:off x="457200" y="2468880"/>
+            <a:ext cx="8229600" cy="457200"/>
+          </a:xfrm>
+          <a:prstGeom prst="rect">
+            <a:avLst/>
+          </a:prstGeom>
+          <a:noFill/>
+        </p:spPr>
+        <p:txBody>
+          <a:bodyPr wrap="square">
+            <a:spAutoFit/>
+          </a:bodyPr>
+          <a:lstStyle/>
+          <a:p>
+            <a:pPr algn="ctr"/>
+            <a:r>
+              <a:rPr sz="1800" b="0" i="0">
+                <a:solidFill>
+                  <a:srgbClr val="9AA3AB"/>
+                </a:solidFill>
+              </a:rPr>
+              <a:t>Robert Nystrom</a:t>
+            </a:r>
           </a:p>
         </p:txBody>
       </p:sp>

--- a/slides/00 Course Intro.pptx
+++ b/slides/00 Course Intro.pptx
@@ -10,7 +10,7 @@
   <p:sldIdLst>
     <p:sldId id="256" r:id="rId6"/>
     <p:sldId id="257" r:id="rId7"/>
-    <p:sldId id="258" r:id="rId8"/>
+    <p:sldId id="269" r:id="rId28"/>
     <p:sldId id="259" r:id="rId9"/>
     <p:sldId id="260" r:id="rId10"/>
     <p:sldId id="261" r:id="rId11"/>
@@ -1121,6 +1121,69 @@
 </p:notes>
 </file>
 
+<file path=ppt/notesSlides/notesSlide14.xml><?xml version="1.0" encoding="utf-8"?>
+<p:notes xmlns:a="http://schemas.openxmlformats.org/drawingml/2006/main" xmlns:p="http://schemas.openxmlformats.org/presentationml/2006/main" xmlns:r="http://schemas.openxmlformats.org/officeDocument/2006/relationships">
+  <p:cSld>
+    <p:spTree>
+      <p:nvGrpSpPr>
+        <p:cNvPr id="1" name=""/>
+        <p:cNvGrpSpPr/>
+        <p:nvPr/>
+      </p:nvGrpSpPr>
+      <p:grpSpPr>
+        <a:xfrm>
+          <a:off x="0" y="0"/>
+          <a:ext cx="0" cy="0"/>
+          <a:chOff x="0" y="0"/>
+          <a:chExt cx="0" cy="0"/>
+        </a:xfrm>
+      </p:grpSpPr>
+      <p:sp>
+        <p:nvSpPr>
+          <p:cNvPr id="2" name="Slide Image Placeholder 1"/>
+          <p:cNvSpPr>
+            <a:spLocks noGrp="1"/>
+          </p:cNvSpPr>
+          <p:nvPr>
+            <p:ph type="sldImg" idx="2"/>
+          </p:nvPr>
+        </p:nvSpPr>
+        <p:spPr/>
+      </p:sp>
+      <p:sp>
+        <p:nvSpPr>
+          <p:cNvPr id="3" name="Notes Placeholder 2"/>
+          <p:cNvSpPr>
+            <a:spLocks noGrp="1"/>
+          </p:cNvSpPr>
+          <p:nvPr>
+            <p:ph type="body" idx="1"/>
+          </p:nvPr>
+        </p:nvSpPr>
+        <p:spPr/>
+        <p:txBody>
+          <a:bodyPr/>
+          <a:lstStyle/>
+          <a:p>
+            <a:r>
+              <a:t>Go round the room: name, study line, a game you’ve played a lot, and whether you’ve made a game before.</a:t>
+            </a:r>
+          </a:p>
+          <a:p>
+            <a:r>
+              <a:t>Note who has made games before; they make good group anchors.</a:t>
+            </a:r>
+          </a:p>
+        </p:txBody>
+      </p:sp>
+    </p:spTree>
+  </p:cSld>
+  <p:clrMapOvr>
+    <a:masterClrMapping/>
+  </p:clrMapOvr>
+</p:notes>
+</file>
+
 <file path=ppt/notesSlides/notesSlide2.xml><?xml version="1.0" encoding="utf-8"?>
 <p:notes xmlns:a="http://schemas.openxmlformats.org/drawingml/2006/main" xmlns:r="http://schemas.openxmlformats.org/officeDocument/2006/relationships" xmlns:mc="http://schemas.openxmlformats.org/markup-compatibility/2006" xmlns:mv="urn:schemas-microsoft-com:mac:vml" xmlns:p="http://schemas.openxmlformats.org/presentationml/2006/main" xmlns:c="http://schemas.openxmlformats.org/drawingml/2006/chart" xmlns:dgm="http://schemas.openxmlformats.org/drawingml/2006/diagram" xmlns:o="urn:schemas-microsoft-com:office:office" xmlns:v="urn:schemas-microsoft-com:vml" xmlns:pvml="urn:schemas-microsoft-com:office:powerpoint" xmlns:com="http://schemas.openxmlformats.org/drawingml/2006/compatibility" xmlns:p14="http://schemas.microsoft.com/office/powerpoint/2010/main" xmlns:p15="http://schemas.microsoft.com/office/powerpoint/2012/main" xmlns:ahyp="http://schemas.microsoft.com/office/drawing/2018/hyperlinkcolor" showMasterPhAnim="0" showMasterSp="0">
   <p:cSld>
@@ -1198,100 +1261,6 @@
           <a:p>
             <a:r>
               <a:t>A short introduction: background, what I work on, how to reach me. Keep it to a minute.</a:t>
-            </a:r>
-          </a:p>
-        </p:txBody>
-      </p:sp>
-    </p:spTree>
-  </p:cSld>
-  <p:clrMapOvr>
-    <a:masterClrMapping/>
-  </p:clrMapOvr>
-</p:notes>
-</file>
-
-<file path=ppt/notesSlides/notesSlide3.xml><?xml version="1.0" encoding="utf-8"?>
-<p:notes xmlns:a="http://schemas.openxmlformats.org/drawingml/2006/main" xmlns:r="http://schemas.openxmlformats.org/officeDocument/2006/relationships" xmlns:mc="http://schemas.openxmlformats.org/markup-compatibility/2006" xmlns:mv="urn:schemas-microsoft-com:mac:vml" xmlns:p="http://schemas.openxmlformats.org/presentationml/2006/main" xmlns:c="http://schemas.openxmlformats.org/drawingml/2006/chart" xmlns:dgm="http://schemas.openxmlformats.org/drawingml/2006/diagram" xmlns:o="urn:schemas-microsoft-com:office:office" xmlns:v="urn:schemas-microsoft-com:vml" xmlns:pvml="urn:schemas-microsoft-com:office:powerpoint" xmlns:com="http://schemas.openxmlformats.org/drawingml/2006/compatibility" xmlns:p14="http://schemas.microsoft.com/office/powerpoint/2010/main" xmlns:p15="http://schemas.microsoft.com/office/powerpoint/2012/main" xmlns:ahyp="http://schemas.microsoft.com/office/drawing/2018/hyperlinkcolor" showMasterPhAnim="0" showMasterSp="0">
-  <p:cSld>
-    <p:spTree>
-      <p:nvGrpSpPr>
-        <p:cNvPr id="49" name="Shape 49"/>
-        <p:cNvGrpSpPr/>
-        <p:nvPr/>
-      </p:nvGrpSpPr>
-      <p:grpSpPr>
-        <a:xfrm>
-          <a:off x="0" y="0"/>
-          <a:ext cx="0" cy="0"/>
-          <a:chOff x="0" y="0"/>
-          <a:chExt cx="0" cy="0"/>
-        </a:xfrm>
-      </p:grpSpPr>
-      <p:sp>
-        <p:nvSpPr>
-          <p:cNvPr id="50" name="Google Shape;50;g3932a601320_0_124:notes"/>
-          <p:cNvSpPr/>
-          <p:nvPr>
-            <p:ph idx="2" type="sldImg"/>
-          </p:nvPr>
-        </p:nvSpPr>
-        <p:spPr>
-          <a:xfrm>
-            <a:off x="381300" y="685800"/>
-            <a:ext cx="6096000" cy="3429000"/>
-          </a:xfrm>
-          <a:custGeom>
-            <a:rect b="b" l="l" r="r" t="t"/>
-            <a:pathLst>
-              <a:path extrusionOk="0" h="120000" w="120000">
-                <a:moveTo>
-                  <a:pt x="0" y="0"/>
-                </a:moveTo>
-                <a:lnTo>
-                  <a:pt x="120000" y="0"/>
-                </a:lnTo>
-                <a:lnTo>
-                  <a:pt x="120000" y="120000"/>
-                </a:lnTo>
-                <a:lnTo>
-                  <a:pt x="0" y="120000"/>
-                </a:lnTo>
-                <a:close/>
-              </a:path>
-            </a:pathLst>
-          </a:custGeom>
-        </p:spPr>
-      </p:sp>
-      <p:sp>
-        <p:nvSpPr>
-          <p:cNvPr id="51" name="Google Shape;51;g3932a601320_0_124:notes"/>
-          <p:cNvSpPr txBox="1"/>
-          <p:nvPr>
-            <p:ph idx="1" type="body"/>
-          </p:nvPr>
-        </p:nvSpPr>
-        <p:spPr>
-          <a:xfrm>
-            <a:off x="685800" y="4343400"/>
-            <a:ext cx="5486400" cy="4114800"/>
-          </a:xfrm>
-          <a:prstGeom prst="rect">
-            <a:avLst/>
-          </a:prstGeom>
-        </p:spPr>
-        <p:txBody>
-          <a:bodyPr anchorCtr="0" anchor="t" bIns="91425" lIns="91425" spcFirstLastPara="1" rIns="91425" wrap="square" tIns="91425">
-            <a:noAutofit/>
-          </a:bodyPr>
-          <a:lstStyle/>
-          <a:p>
-            <a:r>
-              <a:t>Go round the room: name, study line, a game you’ve played a lot, and whether you’ve made a game before.</a:t>
-            </a:r>
-          </a:p>
-          <a:p>
-            <a:r>
-              <a:t>Note who has made games before; they make good group anchors.</a:t>
             </a:r>
           </a:p>
         </p:txBody>
@@ -5520,6 +5489,158 @@
 </file>
 
 <file path=ppt/slides/slide10.xml><?xml version="1.0" encoding="utf-8"?>
+<p:sld xmlns:a="http://schemas.openxmlformats.org/drawingml/2006/main" xmlns:r="http://schemas.openxmlformats.org/officeDocument/2006/relationships" xmlns:mc="http://schemas.openxmlformats.org/markup-compatibility/2006" xmlns:mv="urn:schemas-microsoft-com:mac:vml" xmlns:p="http://schemas.openxmlformats.org/presentationml/2006/main" xmlns:c="http://schemas.openxmlformats.org/drawingml/2006/chart" xmlns:dgm="http://schemas.openxmlformats.org/drawingml/2006/diagram" xmlns:o="urn:schemas-microsoft-com:office:office" xmlns:v="urn:schemas-microsoft-com:vml" xmlns:pvml="urn:schemas-microsoft-com:office:powerpoint" xmlns:com="http://schemas.openxmlformats.org/drawingml/2006/compatibility" xmlns:p14="http://schemas.microsoft.com/office/powerpoint/2010/main" xmlns:p15="http://schemas.microsoft.com/office/powerpoint/2012/main" xmlns:ahyp="http://schemas.microsoft.com/office/drawing/2018/hyperlinkcolor">
+  <p:cSld>
+    <p:spTree>
+      <p:nvGrpSpPr>
+        <p:cNvPr id="87" name="Shape 87"/>
+        <p:cNvGrpSpPr/>
+        <p:nvPr/>
+      </p:nvGrpSpPr>
+      <p:grpSpPr>
+        <a:xfrm>
+          <a:off x="0" y="0"/>
+          <a:ext cx="0" cy="0"/>
+          <a:chOff x="0" y="0"/>
+          <a:chExt cx="0" cy="0"/>
+        </a:xfrm>
+      </p:grpSpPr>
+      <p:sp>
+        <p:nvSpPr>
+          <p:cNvPr id="89" name="Google Shape;89;p17"/>
+          <p:cNvSpPr txBox="1"/>
+          <p:nvPr/>
+        </p:nvSpPr>
+        <p:spPr>
+          <a:xfrm>
+            <a:off x="3013800" y="4453575"/>
+            <a:ext cx="3116400" cy="391200"/>
+          </a:xfrm>
+          <a:prstGeom prst="rect">
+            <a:avLst/>
+          </a:prstGeom>
+          <a:noFill/>
+          <a:ln>
+            <a:noFill/>
+          </a:ln>
+        </p:spPr>
+        <p:txBody>
+          <a:bodyPr anchorCtr="0" anchor="t" bIns="91425" lIns="91425" spcFirstLastPara="1" rIns="91425" wrap="square" tIns="91425">
+            <a:noAutofit/>
+          </a:bodyPr>
+          <a:lstStyle/>
+          <a:p>
+            <a:pPr indent="0" lvl="0" marL="0" rtl="0" algn="ctr">
+              <a:spcBef>
+                <a:spcPts val="0"/>
+              </a:spcBef>
+              <a:spcAft>
+                <a:spcPts val="0"/>
+              </a:spcAft>
+              <a:buNone/>
+            </a:pPr>
+            <a:r>
+              <a:rPr lang="en" u="sng">
+                <a:solidFill>
+                  <a:schemeClr val="hlink"/>
+                </a:solidFill>
+                <a:latin typeface="Roboto Light"/>
+                <a:ea typeface="Roboto Light"/>
+                <a:cs typeface="Roboto Light"/>
+                <a:sym typeface="Roboto Light"/>
+                <a:hlinkClick r:id="rId4"/>
+              </a:rPr>
+              <a:t>gameprogrammingpatterns.com</a:t>
+            </a:r>
+            <a:endParaRPr>
+              <a:solidFill>
+                <a:schemeClr val="dk1"/>
+              </a:solidFill>
+              <a:latin typeface="Roboto Light"/>
+              <a:ea typeface="Roboto Light"/>
+              <a:cs typeface="Roboto Light"/>
+              <a:sym typeface="Roboto Light"/>
+            </a:endParaRPr>
+          </a:p>
+        </p:txBody>
+      </p:sp>
+      <p:sp>
+        <p:nvSpPr>
+          <p:cNvPr id="90" name="TextBox 89"/>
+          <p:cNvSpPr txBox="1"/>
+          <p:nvPr/>
+        </p:nvSpPr>
+        <p:spPr>
+          <a:xfrm>
+            <a:off x="457200" y="1920240"/>
+            <a:ext cx="8229600" cy="457200"/>
+          </a:xfrm>
+          <a:prstGeom prst="rect">
+            <a:avLst/>
+          </a:prstGeom>
+          <a:noFill/>
+        </p:spPr>
+        <p:txBody>
+          <a:bodyPr wrap="square">
+            <a:spAutoFit/>
+          </a:bodyPr>
+          <a:lstStyle/>
+          <a:p>
+            <a:pPr algn="ctr"/>
+            <a:r>
+              <a:rPr sz="2200" b="0" i="0">
+                <a:solidFill>
+                  <a:srgbClr val="DEE2E6"/>
+                </a:solidFill>
+              </a:rPr>
+              <a:t>Game Programming Patterns</a:t>
+            </a:r>
+          </a:p>
+        </p:txBody>
+      </p:sp>
+      <p:sp>
+        <p:nvSpPr>
+          <p:cNvPr id="91" name="TextBox 90"/>
+          <p:cNvSpPr txBox="1"/>
+          <p:nvPr/>
+        </p:nvSpPr>
+        <p:spPr>
+          <a:xfrm>
+            <a:off x="457200" y="2468880"/>
+            <a:ext cx="8229600" cy="457200"/>
+          </a:xfrm>
+          <a:prstGeom prst="rect">
+            <a:avLst/>
+          </a:prstGeom>
+          <a:noFill/>
+        </p:spPr>
+        <p:txBody>
+          <a:bodyPr wrap="square">
+            <a:spAutoFit/>
+          </a:bodyPr>
+          <a:lstStyle/>
+          <a:p>
+            <a:pPr algn="ctr"/>
+            <a:r>
+              <a:rPr sz="1800" b="0" i="0">
+                <a:solidFill>
+                  <a:srgbClr val="9AA3AB"/>
+                </a:solidFill>
+              </a:rPr>
+              <a:t>Robert Nystrom</a:t>
+            </a:r>
+          </a:p>
+        </p:txBody>
+      </p:sp>
+    </p:spTree>
+  </p:cSld>
+  <p:clrMapOvr>
+    <a:masterClrMapping/>
+  </p:clrMapOvr>
+</p:sld>
+</file>
+
+<file path=ppt/slides/slide11.xml><?xml version="1.0" encoding="utf-8"?>
 <p:sld xmlns:a="http://schemas.openxmlformats.org/drawingml/2006/main" xmlns:p="http://schemas.openxmlformats.org/presentationml/2006/main" xmlns:r="http://schemas.openxmlformats.org/officeDocument/2006/relationships">
   <p:cSld>
     <p:spTree>
@@ -5658,7 +5779,7 @@
 </p:sld>
 </file>
 
-<file path=ppt/slides/slide11.xml><?xml version="1.0" encoding="utf-8"?>
+<file path=ppt/slides/slide12.xml><?xml version="1.0" encoding="utf-8"?>
 <p:sld xmlns:a="http://schemas.openxmlformats.org/drawingml/2006/main" xmlns:r="http://schemas.openxmlformats.org/officeDocument/2006/relationships" xmlns:mc="http://schemas.openxmlformats.org/markup-compatibility/2006" xmlns:mv="urn:schemas-microsoft-com:mac:vml" xmlns:p="http://schemas.openxmlformats.org/presentationml/2006/main" xmlns:c="http://schemas.openxmlformats.org/drawingml/2006/chart" xmlns:dgm="http://schemas.openxmlformats.org/drawingml/2006/diagram" xmlns:o="urn:schemas-microsoft-com:office:office" xmlns:v="urn:schemas-microsoft-com:vml" xmlns:pvml="urn:schemas-microsoft-com:office:powerpoint" xmlns:com="http://schemas.openxmlformats.org/drawingml/2006/compatibility" xmlns:p14="http://schemas.microsoft.com/office/powerpoint/2010/main" xmlns:p15="http://schemas.microsoft.com/office/powerpoint/2012/main" xmlns:ahyp="http://schemas.microsoft.com/office/drawing/2018/hyperlinkcolor">
   <p:cSld>
     <p:spTree>
@@ -5815,7 +5936,7 @@
 </p:sld>
 </file>
 
-<file path=ppt/slides/slide12.xml><?xml version="1.0" encoding="utf-8"?>
+<file path=ppt/slides/slide13.xml><?xml version="1.0" encoding="utf-8"?>
 <p:sld xmlns:a="http://schemas.openxmlformats.org/drawingml/2006/main" xmlns:r="http://schemas.openxmlformats.org/officeDocument/2006/relationships" xmlns:mc="http://schemas.openxmlformats.org/markup-compatibility/2006" xmlns:mv="urn:schemas-microsoft-com:mac:vml" xmlns:p="http://schemas.openxmlformats.org/presentationml/2006/main" xmlns:c="http://schemas.openxmlformats.org/drawingml/2006/chart" xmlns:dgm="http://schemas.openxmlformats.org/drawingml/2006/diagram" xmlns:o="urn:schemas-microsoft-com:office:office" xmlns:v="urn:schemas-microsoft-com:vml" xmlns:pvml="urn:schemas-microsoft-com:office:powerpoint" xmlns:com="http://schemas.openxmlformats.org/drawingml/2006/compatibility" xmlns:p14="http://schemas.microsoft.com/office/powerpoint/2010/main" xmlns:p15="http://schemas.microsoft.com/office/powerpoint/2012/main" xmlns:ahyp="http://schemas.microsoft.com/office/drawing/2018/hyperlinkcolor">
   <p:cSld>
     <p:spTree>
@@ -6298,7 +6419,7 @@
 </p:sld>
 </file>
 
-<file path=ppt/slides/slide13.xml><?xml version="1.0" encoding="utf-8"?>
+<file path=ppt/slides/slide14.xml><?xml version="1.0" encoding="utf-8"?>
 <p:sld xmlns:a="http://schemas.openxmlformats.org/drawingml/2006/main" xmlns:p="http://schemas.openxmlformats.org/presentationml/2006/main" xmlns:r="http://schemas.openxmlformats.org/officeDocument/2006/relationships">
   <p:cSld>
     <p:spTree>
@@ -6674,58 +6795,115 @@
 </p:sld>
 </file>
 
-<file path=ppt/slides/slide3.xml><?xml version="1.0" encoding="utf-8"?>
-<p:sld xmlns:a="http://schemas.openxmlformats.org/drawingml/2006/main" xmlns:r="http://schemas.openxmlformats.org/officeDocument/2006/relationships" xmlns:mc="http://schemas.openxmlformats.org/markup-compatibility/2006" xmlns:mv="urn:schemas-microsoft-com:mac:vml" xmlns:p="http://schemas.openxmlformats.org/presentationml/2006/main" xmlns:c="http://schemas.openxmlformats.org/drawingml/2006/chart" xmlns:dgm="http://schemas.openxmlformats.org/drawingml/2006/diagram" xmlns:o="urn:schemas-microsoft-com:office:office" xmlns:v="urn:schemas-microsoft-com:vml" xmlns:pvml="urn:schemas-microsoft-com:office:powerpoint" xmlns:com="http://schemas.openxmlformats.org/drawingml/2006/compatibility" xmlns:p14="http://schemas.microsoft.com/office/powerpoint/2010/main" xmlns:p15="http://schemas.microsoft.com/office/powerpoint/2012/main" xmlns:ahyp="http://schemas.microsoft.com/office/drawing/2018/hyperlinkcolor">
+<file path=ppt/slides/slide4.xml><?xml version="1.0" encoding="utf-8"?>
+<p:sld xmlns:a="http://schemas.openxmlformats.org/drawingml/2006/main" xmlns:p="http://schemas.openxmlformats.org/presentationml/2006/main" xmlns:r="http://schemas.openxmlformats.org/officeDocument/2006/relationships">
   <p:cSld>
     <p:spTree>
       <p:nvGrpSpPr>
-        <p:cNvPr id="52" name="Shape 52"/>
+        <p:cNvPr id="1" name=""/>
         <p:cNvGrpSpPr/>
         <p:nvPr/>
       </p:nvGrpSpPr>
-      <p:grpSpPr>
-        <a:xfrm>
-          <a:off x="0" y="0"/>
-          <a:ext cx="0" cy="0"/>
-          <a:chOff x="0" y="0"/>
-          <a:chExt cx="0" cy="0"/>
-        </a:xfrm>
-      </p:grpSpPr>
+      <p:grpSpPr/>
       <p:sp>
         <p:nvSpPr>
-          <p:cNvPr id="53" name="Google Shape;53;p11"/>
-          <p:cNvSpPr txBox="1"/>
+          <p:cNvPr id="2" name="Title 1"/>
+          <p:cNvSpPr>
+            <a:spLocks noGrp="1"/>
+          </p:cNvSpPr>
           <p:nvPr>
             <p:ph type="title"/>
           </p:nvPr>
         </p:nvSpPr>
+        <p:spPr/>
+        <p:txBody>
+          <a:bodyPr/>
+          <a:lstStyle/>
+          <a:p>
+            <a:pPr indent="0" lvl="0" marL="0" rtl="0" algn="l">
+              <a:spcBef>
+                <a:spcPts val="0"/>
+              </a:spcBef>
+              <a:spcAft>
+                <a:spcPts val="0"/>
+              </a:spcAft>
+              <a:buNone/>
+            </a:pPr>
+            <a:r>
+              <a:rPr lang="en"/>
+              <a:t>Who Are You?</a:t>
+            </a:r>
+            <a:endParaRPr/>
+          </a:p>
+        </p:txBody>
+      </p:sp>
+      <p:sp>
+        <p:nvSpPr>
+          <p:cNvPr id="3" name="Text Placeholder 2"/>
+          <p:cNvSpPr>
+            <a:spLocks noGrp="1"/>
+          </p:cNvSpPr>
+          <p:nvPr>
+            <p:ph type="body" idx="1"/>
+          </p:nvPr>
+        </p:nvSpPr>
         <p:spPr>
           <a:xfrm>
-            <a:off x="311700" y="195615"/>
-            <a:ext cx="8520600" cy="572700"/>
+            <a:off x="311700" y="885950"/>
+            <a:ext cx="8520600" cy="1289304"/>
           </a:xfrm>
-          <a:prstGeom prst="rect">
-            <a:avLst/>
-          </a:prstGeom>
         </p:spPr>
         <p:txBody>
-          <a:bodyPr anchorCtr="0" anchor="t" bIns="91425" lIns="91425" spcFirstLastPara="1" rIns="91425" wrap="square" tIns="91425">
-            <a:normAutofit fontScale="90000"/>
-          </a:bodyPr>
+          <a:bodyPr/>
           <a:lstStyle/>
           <a:p>
-            <a:pPr indent="0" lvl="0" marL="0" rtl="0" algn="l">
-              <a:spcBef>
-                <a:spcPts val="0"/>
-              </a:spcBef>
-              <a:spcAft>
-                <a:spcPts val="0"/>
-              </a:spcAft>
-              <a:buNone/>
+            <a:pPr indent="-330200" lvl="0" marL="457200" rtl="0" algn="l">
+              <a:spcBef>
+                <a:spcPts val="0"/>
+              </a:spcBef>
+              <a:spcAft>
+                <a:spcPts val="0"/>
+              </a:spcAft>
+              <a:buSzPts val="1600"/>
+              <a:buChar char="●"/>
             </a:pPr>
             <a:r>
               <a:rPr lang="en"/>
-              <a:t>Who Are You?</a:t>
+              <a:t>Your name, and what you study</a:t>
+            </a:r>
+            <a:endParaRPr/>
+          </a:p>
+          <a:p>
+            <a:pPr indent="-330200" lvl="0" marL="457200" rtl="0" algn="l">
+              <a:spcBef>
+                <a:spcPts val="0"/>
+              </a:spcBef>
+              <a:spcAft>
+                <a:spcPts val="0"/>
+              </a:spcAft>
+              <a:buSzPts val="1600"/>
+              <a:buChar char="●"/>
+            </a:pPr>
+            <a:r>
+              <a:rPr lang="en"/>
+              <a:t>A game you have played a lot</a:t>
+            </a:r>
+            <a:endParaRPr/>
+          </a:p>
+          <a:p>
+            <a:pPr indent="-330200" lvl="0" marL="457200" rtl="0" algn="l">
+              <a:spcBef>
+                <a:spcPts val="0"/>
+              </a:spcBef>
+              <a:spcAft>
+                <a:spcPts val="0"/>
+              </a:spcAft>
+              <a:buSzPts val="1600"/>
+              <a:buChar char="●"/>
+            </a:pPr>
+            <a:r>
+              <a:rPr lang="en"/>
+              <a:t>Have you made a game before?</a:t>
             </a:r>
             <a:endParaRPr/>
           </a:p>
@@ -6739,7 +6917,7 @@
 </p:sld>
 </file>
 
-<file path=ppt/slides/slide4.xml><?xml version="1.0" encoding="utf-8"?>
+<file path=ppt/slides/slide5.xml><?xml version="1.0" encoding="utf-8"?>
 <p:sld xmlns:a="http://schemas.openxmlformats.org/drawingml/2006/main" xmlns:r="http://schemas.openxmlformats.org/officeDocument/2006/relationships" xmlns:mc="http://schemas.openxmlformats.org/markup-compatibility/2006" xmlns:mv="urn:schemas-microsoft-com:mac:vml" xmlns:p="http://schemas.openxmlformats.org/presentationml/2006/main" xmlns:c="http://schemas.openxmlformats.org/drawingml/2006/chart" xmlns:dgm="http://schemas.openxmlformats.org/drawingml/2006/diagram" xmlns:o="urn:schemas-microsoft-com:office:office" xmlns:v="urn:schemas-microsoft-com:vml" xmlns:pvml="urn:schemas-microsoft-com:office:powerpoint" xmlns:com="http://schemas.openxmlformats.org/drawingml/2006/compatibility" xmlns:p14="http://schemas.microsoft.com/office/powerpoint/2010/main" xmlns:p15="http://schemas.microsoft.com/office/powerpoint/2012/main" xmlns:ahyp="http://schemas.microsoft.com/office/drawing/2018/hyperlinkcolor">
   <p:cSld>
     <p:spTree>
@@ -6804,7 +6982,7 @@
 </p:sld>
 </file>
 
-<file path=ppt/slides/slide5.xml><?xml version="1.0" encoding="utf-8"?>
+<file path=ppt/slides/slide6.xml><?xml version="1.0" encoding="utf-8"?>
 <p:sld xmlns:a="http://schemas.openxmlformats.org/drawingml/2006/main" xmlns:r="http://schemas.openxmlformats.org/officeDocument/2006/relationships" xmlns:mc="http://schemas.openxmlformats.org/markup-compatibility/2006" xmlns:mv="urn:schemas-microsoft-com:mac:vml" xmlns:p="http://schemas.openxmlformats.org/presentationml/2006/main" xmlns:c="http://schemas.openxmlformats.org/drawingml/2006/chart" xmlns:dgm="http://schemas.openxmlformats.org/drawingml/2006/diagram" xmlns:o="urn:schemas-microsoft-com:office:office" xmlns:v="urn:schemas-microsoft-com:vml" xmlns:pvml="urn:schemas-microsoft-com:office:powerpoint" xmlns:com="http://schemas.openxmlformats.org/drawingml/2006/compatibility" xmlns:p14="http://schemas.microsoft.com/office/powerpoint/2010/main" xmlns:p15="http://schemas.microsoft.com/office/powerpoint/2012/main" xmlns:ahyp="http://schemas.microsoft.com/office/drawing/2018/hyperlinkcolor">
   <p:cSld>
     <p:spTree>
@@ -6941,7 +7119,7 @@
 </p:sld>
 </file>
 
-<file path=ppt/slides/slide6.xml><?xml version="1.0" encoding="utf-8"?>
+<file path=ppt/slides/slide7.xml><?xml version="1.0" encoding="utf-8"?>
 <p:sld xmlns:a="http://schemas.openxmlformats.org/drawingml/2006/main" xmlns:r="http://schemas.openxmlformats.org/officeDocument/2006/relationships" xmlns:mc="http://schemas.openxmlformats.org/markup-compatibility/2006" xmlns:mv="urn:schemas-microsoft-com:mac:vml" xmlns:p="http://schemas.openxmlformats.org/presentationml/2006/main" xmlns:c="http://schemas.openxmlformats.org/drawingml/2006/chart" xmlns:dgm="http://schemas.openxmlformats.org/drawingml/2006/diagram" xmlns:o="urn:schemas-microsoft-com:office:office" xmlns:v="urn:schemas-microsoft-com:vml" xmlns:pvml="urn:schemas-microsoft-com:office:powerpoint" xmlns:com="http://schemas.openxmlformats.org/drawingml/2006/compatibility" xmlns:p14="http://schemas.microsoft.com/office/powerpoint/2010/main" xmlns:p15="http://schemas.microsoft.com/office/powerpoint/2012/main" xmlns:ahyp="http://schemas.microsoft.com/office/drawing/2018/hyperlinkcolor">
   <p:cSld>
     <p:spTree>
@@ -7132,7 +7310,7 @@
 </p:sld>
 </file>
 
-<file path=ppt/slides/slide7.xml><?xml version="1.0" encoding="utf-8"?>
+<file path=ppt/slides/slide8.xml><?xml version="1.0" encoding="utf-8"?>
 <p:sld xmlns:a="http://schemas.openxmlformats.org/drawingml/2006/main" xmlns:r="http://schemas.openxmlformats.org/officeDocument/2006/relationships" xmlns:mc="http://schemas.openxmlformats.org/markup-compatibility/2006" xmlns:mv="urn:schemas-microsoft-com:mac:vml" xmlns:p="http://schemas.openxmlformats.org/presentationml/2006/main" xmlns:c="http://schemas.openxmlformats.org/drawingml/2006/chart" xmlns:dgm="http://schemas.openxmlformats.org/drawingml/2006/diagram" xmlns:o="urn:schemas-microsoft-com:office:office" xmlns:v="urn:schemas-microsoft-com:vml" xmlns:pvml="urn:schemas-microsoft-com:office:powerpoint" xmlns:com="http://schemas.openxmlformats.org/drawingml/2006/compatibility" xmlns:p14="http://schemas.microsoft.com/office/powerpoint/2010/main" xmlns:p15="http://schemas.microsoft.com/office/powerpoint/2012/main" xmlns:ahyp="http://schemas.microsoft.com/office/drawing/2018/hyperlinkcolor">
   <p:cSld>
     <p:spTree>
@@ -7442,7 +7620,7 @@
 </p:sld>
 </file>
 
-<file path=ppt/slides/slide8.xml><?xml version="1.0" encoding="utf-8"?>
+<file path=ppt/slides/slide9.xml><?xml version="1.0" encoding="utf-8"?>
 <p:sld xmlns:a="http://schemas.openxmlformats.org/drawingml/2006/main" xmlns:r="http://schemas.openxmlformats.org/officeDocument/2006/relationships" xmlns:mc="http://schemas.openxmlformats.org/markup-compatibility/2006" xmlns:mv="urn:schemas-microsoft-com:mac:vml" xmlns:p="http://schemas.openxmlformats.org/presentationml/2006/main" xmlns:c="http://schemas.openxmlformats.org/drawingml/2006/chart" xmlns:dgm="http://schemas.openxmlformats.org/drawingml/2006/diagram" xmlns:o="urn:schemas-microsoft-com:office:office" xmlns:v="urn:schemas-microsoft-com:vml" xmlns:pvml="urn:schemas-microsoft-com:office:powerpoint" xmlns:com="http://schemas.openxmlformats.org/drawingml/2006/compatibility" xmlns:p14="http://schemas.microsoft.com/office/powerpoint/2010/main" xmlns:p15="http://schemas.microsoft.com/office/powerpoint/2012/main" xmlns:ahyp="http://schemas.microsoft.com/office/drawing/2018/hyperlinkcolor">
   <p:cSld>
     <p:spTree>
@@ -7724,158 +7902,6 @@
               <a:t>Vampire Survivors</a:t>
             </a:r>
             <a:endParaRPr/>
-          </a:p>
-        </p:txBody>
-      </p:sp>
-    </p:spTree>
-  </p:cSld>
-  <p:clrMapOvr>
-    <a:masterClrMapping/>
-  </p:clrMapOvr>
-</p:sld>
-</file>
-
-<file path=ppt/slides/slide9.xml><?xml version="1.0" encoding="utf-8"?>
-<p:sld xmlns:a="http://schemas.openxmlformats.org/drawingml/2006/main" xmlns:r="http://schemas.openxmlformats.org/officeDocument/2006/relationships" xmlns:mc="http://schemas.openxmlformats.org/markup-compatibility/2006" xmlns:mv="urn:schemas-microsoft-com:mac:vml" xmlns:p="http://schemas.openxmlformats.org/presentationml/2006/main" xmlns:c="http://schemas.openxmlformats.org/drawingml/2006/chart" xmlns:dgm="http://schemas.openxmlformats.org/drawingml/2006/diagram" xmlns:o="urn:schemas-microsoft-com:office:office" xmlns:v="urn:schemas-microsoft-com:vml" xmlns:pvml="urn:schemas-microsoft-com:office:powerpoint" xmlns:com="http://schemas.openxmlformats.org/drawingml/2006/compatibility" xmlns:p14="http://schemas.microsoft.com/office/powerpoint/2010/main" xmlns:p15="http://schemas.microsoft.com/office/powerpoint/2012/main" xmlns:ahyp="http://schemas.microsoft.com/office/drawing/2018/hyperlinkcolor">
-  <p:cSld>
-    <p:spTree>
-      <p:nvGrpSpPr>
-        <p:cNvPr id="87" name="Shape 87"/>
-        <p:cNvGrpSpPr/>
-        <p:nvPr/>
-      </p:nvGrpSpPr>
-      <p:grpSpPr>
-        <a:xfrm>
-          <a:off x="0" y="0"/>
-          <a:ext cx="0" cy="0"/>
-          <a:chOff x="0" y="0"/>
-          <a:chExt cx="0" cy="0"/>
-        </a:xfrm>
-      </p:grpSpPr>
-      <p:sp>
-        <p:nvSpPr>
-          <p:cNvPr id="89" name="Google Shape;89;p17"/>
-          <p:cNvSpPr txBox="1"/>
-          <p:nvPr/>
-        </p:nvSpPr>
-        <p:spPr>
-          <a:xfrm>
-            <a:off x="3013800" y="4453575"/>
-            <a:ext cx="3116400" cy="391200"/>
-          </a:xfrm>
-          <a:prstGeom prst="rect">
-            <a:avLst/>
-          </a:prstGeom>
-          <a:noFill/>
-          <a:ln>
-            <a:noFill/>
-          </a:ln>
-        </p:spPr>
-        <p:txBody>
-          <a:bodyPr anchorCtr="0" anchor="t" bIns="91425" lIns="91425" spcFirstLastPara="1" rIns="91425" wrap="square" tIns="91425">
-            <a:noAutofit/>
-          </a:bodyPr>
-          <a:lstStyle/>
-          <a:p>
-            <a:pPr indent="0" lvl="0" marL="0" rtl="0" algn="ctr">
-              <a:spcBef>
-                <a:spcPts val="0"/>
-              </a:spcBef>
-              <a:spcAft>
-                <a:spcPts val="0"/>
-              </a:spcAft>
-              <a:buNone/>
-            </a:pPr>
-            <a:r>
-              <a:rPr lang="en" u="sng">
-                <a:solidFill>
-                  <a:schemeClr val="hlink"/>
-                </a:solidFill>
-                <a:latin typeface="Roboto Light"/>
-                <a:ea typeface="Roboto Light"/>
-                <a:cs typeface="Roboto Light"/>
-                <a:sym typeface="Roboto Light"/>
-                <a:hlinkClick r:id="rId4"/>
-              </a:rPr>
-              <a:t>gameprogrammingpatterns.com</a:t>
-            </a:r>
-            <a:endParaRPr>
-              <a:solidFill>
-                <a:schemeClr val="dk1"/>
-              </a:solidFill>
-              <a:latin typeface="Roboto Light"/>
-              <a:ea typeface="Roboto Light"/>
-              <a:cs typeface="Roboto Light"/>
-              <a:sym typeface="Roboto Light"/>
-            </a:endParaRPr>
-          </a:p>
-        </p:txBody>
-      </p:sp>
-      <p:sp>
-        <p:nvSpPr>
-          <p:cNvPr id="90" name="TextBox 89"/>
-          <p:cNvSpPr txBox="1"/>
-          <p:nvPr/>
-        </p:nvSpPr>
-        <p:spPr>
-          <a:xfrm>
-            <a:off x="457200" y="1920240"/>
-            <a:ext cx="8229600" cy="457200"/>
-          </a:xfrm>
-          <a:prstGeom prst="rect">
-            <a:avLst/>
-          </a:prstGeom>
-          <a:noFill/>
-        </p:spPr>
-        <p:txBody>
-          <a:bodyPr wrap="square">
-            <a:spAutoFit/>
-          </a:bodyPr>
-          <a:lstStyle/>
-          <a:p>
-            <a:pPr algn="ctr"/>
-            <a:r>
-              <a:rPr sz="2200" b="0" i="0">
-                <a:solidFill>
-                  <a:srgbClr val="DEE2E6"/>
-                </a:solidFill>
-              </a:rPr>
-              <a:t>Game Programming Patterns</a:t>
-            </a:r>
-          </a:p>
-        </p:txBody>
-      </p:sp>
-      <p:sp>
-        <p:nvSpPr>
-          <p:cNvPr id="91" name="TextBox 90"/>
-          <p:cNvSpPr txBox="1"/>
-          <p:nvPr/>
-        </p:nvSpPr>
-        <p:spPr>
-          <a:xfrm>
-            <a:off x="457200" y="2468880"/>
-            <a:ext cx="8229600" cy="457200"/>
-          </a:xfrm>
-          <a:prstGeom prst="rect">
-            <a:avLst/>
-          </a:prstGeom>
-          <a:noFill/>
-        </p:spPr>
-        <p:txBody>
-          <a:bodyPr wrap="square">
-            <a:spAutoFit/>
-          </a:bodyPr>
-          <a:lstStyle/>
-          <a:p>
-            <a:pPr algn="ctr"/>
-            <a:r>
-              <a:rPr sz="1800" b="0" i="0">
-                <a:solidFill>
-                  <a:srgbClr val="9AA3AB"/>
-                </a:solidFill>
-              </a:rPr>
-              <a:t>Robert Nystrom</a:t>
-            </a:r>
           </a:p>
         </p:txBody>
       </p:sp>
